--- a/internal_doc/00.项目管理/02.制度宣传/2014Q3项目制度流程宣传.pptx
+++ b/internal_doc/00.项目管理/02.制度宣传/2014Q3项目制度流程宣传.pptx
@@ -3102,8 +3102,8 @@
         </p:nvSpPr>
         <p:spPr>
           <a:xfrm>
-            <a:off x="1314424" y="3000372"/>
-            <a:ext cx="5186402" cy="642942"/>
+            <a:off x="1671614" y="3929066"/>
+            <a:ext cx="5472154" cy="642942"/>
           </a:xfrm>
           <a:prstGeom prst="roundRect">
             <a:avLst/>
@@ -3163,7 +3163,7 @@
         </p:nvSpPr>
         <p:spPr>
           <a:xfrm>
-            <a:off x="785786" y="3114676"/>
+            <a:off x="1142976" y="4043370"/>
             <a:ext cx="457200" cy="457200"/>
           </a:xfrm>
           <a:prstGeom prst="flowChartConnector">
@@ -3201,7 +3201,7 @@
             <a:pPr algn="ctr"/>
             <a:r>
               <a:rPr lang="en-US" altLang="zh-CN" dirty="0" smtClean="0"/>
-              <a:t>2</a:t>
+              <a:t>3</a:t>
             </a:r>
             <a:endParaRPr lang="zh-CN" altLang="en-US" dirty="0"/>
           </a:p>
@@ -3215,8 +3215,8 @@
         </p:nvSpPr>
         <p:spPr>
           <a:xfrm>
-            <a:off x="1671614" y="3929066"/>
-            <a:ext cx="5543592" cy="642942"/>
+            <a:off x="2100242" y="4857760"/>
+            <a:ext cx="5900782" cy="642942"/>
           </a:xfrm>
           <a:prstGeom prst="roundRect">
             <a:avLst/>
@@ -3276,7 +3276,7 @@
         </p:nvSpPr>
         <p:spPr>
           <a:xfrm>
-            <a:off x="1142976" y="4043370"/>
+            <a:off x="1571604" y="4972064"/>
             <a:ext cx="457200" cy="457200"/>
           </a:xfrm>
           <a:prstGeom prst="flowChartConnector">
@@ -3314,7 +3314,7 @@
             <a:pPr algn="ctr"/>
             <a:r>
               <a:rPr lang="en-US" altLang="zh-CN" dirty="0" smtClean="0"/>
-              <a:t>3</a:t>
+              <a:t>4</a:t>
             </a:r>
             <a:endParaRPr lang="zh-CN" altLang="en-US" dirty="0"/>
           </a:p>
@@ -3328,8 +3328,8 @@
         </p:nvSpPr>
         <p:spPr>
           <a:xfrm>
-            <a:off x="2028804" y="4857760"/>
-            <a:ext cx="5929354" cy="642942"/>
+            <a:off x="1357290" y="3000372"/>
+            <a:ext cx="5143536" cy="642942"/>
           </a:xfrm>
           <a:prstGeom prst="roundRect">
             <a:avLst/>
@@ -3389,7 +3389,7 @@
         </p:nvSpPr>
         <p:spPr>
           <a:xfrm>
-            <a:off x="1500166" y="4972064"/>
+            <a:off x="828652" y="3114676"/>
             <a:ext cx="457200" cy="457200"/>
           </a:xfrm>
           <a:prstGeom prst="flowChartConnector">
@@ -3427,7 +3427,7 @@
             <a:pPr algn="ctr"/>
             <a:r>
               <a:rPr lang="en-US" altLang="zh-CN" dirty="0" smtClean="0"/>
-              <a:t>4</a:t>
+              <a:t>2</a:t>
             </a:r>
             <a:endParaRPr lang="zh-CN" altLang="en-US" dirty="0"/>
           </a:p>
@@ -3484,15 +3484,7 @@
           <a:p>
             <a:r>
               <a:rPr lang="zh-CN" altLang="en-US" b="1" dirty="0" smtClean="0"/>
-              <a:t>输</a:t>
-            </a:r>
-            <a:r>
-              <a:rPr lang="zh-CN" altLang="en-US" b="1" dirty="0" smtClean="0"/>
-              <a:t>出</a:t>
-            </a:r>
-            <a:r>
-              <a:rPr lang="zh-CN" altLang="en-US" b="1" dirty="0" smtClean="0"/>
-              <a:t>：</a:t>
+              <a:t>输出：</a:t>
             </a:r>
             <a:r>
               <a:rPr lang="en-US" altLang="zh-CN" dirty="0" smtClean="0"/>
@@ -3571,6 +3563,13 @@
   <p:clrMapOvr>
     <a:masterClrMapping/>
   </p:clrMapOvr>
+  <p:timing>
+    <p:tnLst>
+      <p:par>
+        <p:cTn id="1" dur="indefinite" restart="never" nodeType="tmRoot"/>
+      </p:par>
+    </p:tnLst>
+  </p:timing>
 </p:sld>
 </file>
 
@@ -3618,19 +3617,7 @@
               <a:rPr lang="en-US" altLang="zh-CN" dirty="0" smtClean="0">
                 <a:hlinkClick r:id="rId3"/>
               </a:rPr>
-              <a:t>http</a:t>
-            </a:r>
-            <a:r>
-              <a:rPr lang="en-US" altLang="zh-CN" dirty="0" smtClean="0">
-                <a:hlinkClick r:id="rId3"/>
-              </a:rPr>
-              <a:t>://</a:t>
-            </a:r>
-            <a:r>
-              <a:rPr lang="en-US" altLang="zh-CN" dirty="0" smtClean="0">
-                <a:hlinkClick r:id="rId3"/>
-              </a:rPr>
-              <a:t>jira:8080</a:t>
+              <a:t>http://jira:8080</a:t>
             </a:r>
             <a:r>
               <a:rPr lang="zh-CN" altLang="en-US" dirty="0" smtClean="0"/>
@@ -4515,11 +4502,7 @@
           <a:p>
             <a:r>
               <a:rPr lang="zh-CN" altLang="en-US" sz="1600" dirty="0" smtClean="0"/>
-              <a:t>要</a:t>
-            </a:r>
-            <a:r>
-              <a:rPr lang="zh-CN" altLang="en-US" sz="1600" dirty="0" smtClean="0"/>
-              <a:t>求</a:t>
+              <a:t>要求</a:t>
             </a:r>
             <a:r>
               <a:rPr lang="en-US" altLang="zh-CN" sz="1600" dirty="0" smtClean="0"/>
@@ -4527,15 +4510,7 @@
             </a:r>
             <a:r>
               <a:rPr lang="zh-CN" altLang="en-US" sz="1600" dirty="0" smtClean="0"/>
-              <a:t>：</a:t>
-            </a:r>
-            <a:r>
-              <a:rPr lang="zh-CN" altLang="en-US" sz="1600" dirty="0" smtClean="0"/>
-              <a:t>标明发生问题的版本信</a:t>
-            </a:r>
-            <a:r>
-              <a:rPr lang="zh-CN" altLang="en-US" sz="1600" dirty="0" smtClean="0"/>
-              <a:t>息</a:t>
+              <a:t>：标明发生问题的版本信息</a:t>
             </a:r>
             <a:endParaRPr lang="en-US" altLang="zh-CN" sz="1600" dirty="0" smtClean="0"/>
           </a:p>
@@ -4860,19 +4835,7 @@
               <a:rPr lang="en-US" altLang="zh-CN" dirty="0" smtClean="0">
                 <a:hlinkClick r:id="rId3"/>
               </a:rPr>
-              <a:t>http</a:t>
-            </a:r>
-            <a:r>
-              <a:rPr lang="en-US" altLang="zh-CN" dirty="0" smtClean="0">
-                <a:hlinkClick r:id="rId3"/>
-              </a:rPr>
-              <a:t>://</a:t>
-            </a:r>
-            <a:r>
-              <a:rPr lang="en-US" altLang="zh-CN" dirty="0" smtClean="0">
-                <a:hlinkClick r:id="rId3"/>
-              </a:rPr>
-              <a:t>192.168.20.200:8080</a:t>
+              <a:t>http://192.168.20.200:8080</a:t>
             </a:r>
             <a:r>
               <a:rPr lang="zh-CN" altLang="en-US" dirty="0" smtClean="0"/>
@@ -6539,11 +6502,7 @@
             </a:r>
             <a:r>
               <a:rPr lang="zh-CN" altLang="en-US" sz="1400" dirty="0" smtClean="0"/>
-              <a:t>用</a:t>
-            </a:r>
-            <a:r>
-              <a:rPr lang="zh-CN" altLang="en-US" sz="1400" dirty="0" smtClean="0"/>
-              <a:t>例总负责人：</a:t>
+              <a:t>用例总负责人：</a:t>
             </a:r>
             <a:r>
               <a:rPr lang="zh-CN" altLang="en-US" sz="1400" b="1" dirty="0" smtClean="0">
@@ -6551,15 +6510,7 @@
                   <a:srgbClr val="C00000"/>
                 </a:solidFill>
               </a:rPr>
-              <a:t>胡晓</a:t>
-            </a:r>
-            <a:r>
-              <a:rPr lang="zh-CN" altLang="en-US" sz="1400" b="1" dirty="0" smtClean="0">
-                <a:solidFill>
-                  <a:srgbClr val="C00000"/>
-                </a:solidFill>
-              </a:rPr>
-              <a:t>均 </a:t>
+              <a:t>胡晓均 </a:t>
             </a:r>
             <a:r>
               <a:rPr lang="en-US" altLang="zh-CN" sz="1400" dirty="0" smtClean="0"/>

--- a/internal_doc/00.项目管理/02.制度宣传/2014Q3项目制度流程宣传.pptx
+++ b/internal_doc/00.项目管理/02.制度宣传/2014Q3项目制度流程宣传.pptx
@@ -6502,7 +6502,11 @@
             </a:r>
             <a:r>
               <a:rPr lang="zh-CN" altLang="en-US" sz="1400" dirty="0" smtClean="0"/>
-              <a:t>用例总负责人：</a:t>
+              <a:t>用例总负责人</a:t>
+            </a:r>
+            <a:r>
+              <a:rPr lang="zh-CN" altLang="en-US" sz="1400" dirty="0" smtClean="0"/>
+              <a:t>：</a:t>
             </a:r>
             <a:r>
               <a:rPr lang="zh-CN" altLang="en-US" sz="1400" b="1" dirty="0" smtClean="0">
@@ -6510,7 +6514,15 @@
                   <a:srgbClr val="C00000"/>
                 </a:solidFill>
               </a:rPr>
-              <a:t>胡晓均 </a:t>
+              <a:t>丁普升</a:t>
+            </a:r>
+            <a:r>
+              <a:rPr lang="zh-CN" altLang="en-US" sz="1400" b="1" dirty="0" smtClean="0">
+                <a:solidFill>
+                  <a:srgbClr val="C00000"/>
+                </a:solidFill>
+              </a:rPr>
+              <a:t> </a:t>
             </a:r>
             <a:r>
               <a:rPr lang="en-US" altLang="zh-CN" sz="1400" dirty="0" smtClean="0"/>
